--- a/crescent-studio-deck.pptx
+++ b/crescent-studio-deck.pptx
@@ -8876,7 +8876,7 @@
                 <a:ea typeface="Pretendard" pitchFamily="34" charset="-122"/>
                 <a:cs typeface="Pretendard" pitchFamily="34" charset="-120"/>
               </a:rPr>
-              <a:t>합리적이고 투명한 가격</a:t>
+              <a:t>구독 플랜 4단계</a:t>
             </a:r>
             <a:endParaRPr lang="en-US" sz="3000" dirty="0"/>
           </a:p>
@@ -8915,7 +8915,7 @@
                 <a:ea typeface="Pretendard" pitchFamily="34" charset="-122"/>
                 <a:cs typeface="Pretendard" pitchFamily="34" charset="-120"/>
               </a:rPr>
-              <a:t>숨겨진 비용 없이 견적 그대로 진행합니다. 정확한 금액은 상담 후 안내드립니다.</a:t>
+              <a:t>초기 제작비 49~249만원 + 월 구독료. 연간 선계약 시 2개월 무료.</a:t>
             </a:r>
             <a:endParaRPr lang="en-US" sz="1150" dirty="0"/>
           </a:p>
@@ -8990,7 +8990,7 @@
                 <a:ea typeface="Pretendard" pitchFamily="34" charset="-122"/>
                 <a:cs typeface="Pretendard" pitchFamily="34" charset="-120"/>
               </a:rPr>
-              <a:t>초기 세팅비 + 월 이용료 구조</a:t>
+              <a:t>Basic 2.9만 / Standard 5.9만 / Pro 9.9만 / Enterprise 19.9만</a:t>
             </a:r>
             <a:endParaRPr lang="en-US" sz="2400" dirty="0"/>
           </a:p>
@@ -9029,7 +9029,7 @@
                 <a:ea typeface="Pretendard" pitchFamily="34" charset="-122"/>
                 <a:cs typeface="Pretendard" pitchFamily="34" charset="-120"/>
               </a:rPr>
-              <a:t>초기 세팅비(브랜드 맞춤 적용) + 월 이용료(서버·유지보수·업데이트 포함)  |  최소 계약 12개월  |  연간 결제 시 2개월 무료</a:t>
+              <a:t>연간 선계약 시 2개월 무료 · 최소 계약 12개월 · 초기 제작비 49~249만원 별도</a:t>
             </a:r>
             <a:endParaRPr lang="en-US" sz="1050" dirty="0"/>
           </a:p>
